--- a/BTP_EndSem_Presentation_DRAFT.pptx
+++ b/BTP_EndSem_Presentation_DRAFT.pptx
@@ -2107,7 +2107,7 @@
                 <a:ea typeface="Times New Roman" pitchFamily="34" charset="-122"/>
                 <a:cs typeface="Times New Roman" pitchFamily="34" charset="-120"/>
               </a:rPr>
-              <a:t>__________</a:t>
+              <a:t>2023UEA7232</a:t>
             </a:r>
             <a:endParaRPr lang="en-US" sz="1600" dirty="0"/>
           </a:p>
@@ -2185,7 +2185,7 @@
                 <a:ea typeface="Times New Roman" pitchFamily="34" charset="-122"/>
                 <a:cs typeface="Times New Roman" pitchFamily="34" charset="-120"/>
               </a:rPr>
-              <a:t>__________</a:t>
+              <a:t>2023UEA7225</a:t>
             </a:r>
             <a:endParaRPr lang="en-US" sz="1600" dirty="0"/>
           </a:p>
@@ -2263,7 +2263,7 @@
                 <a:ea typeface="Times New Roman" pitchFamily="34" charset="-122"/>
                 <a:cs typeface="Times New Roman" pitchFamily="34" charset="-120"/>
               </a:rPr>
-              <a:t>__________</a:t>
+              <a:t>2023UEA6603</a:t>
             </a:r>
             <a:endParaRPr lang="en-US" sz="1600" dirty="0"/>
           </a:p>
@@ -2364,7 +2364,7 @@
                 <a:ea typeface="Times New Roman" pitchFamily="34" charset="-122"/>
                 <a:cs typeface="Times New Roman" pitchFamily="34" charset="-120"/>
               </a:rPr>
-              <a:t>Prof./Dr. ________________________</a:t>
+              <a:t>Dr. Manisha Khulbe</a:t>
             </a:r>
             <a:endParaRPr lang="en-US" sz="1600" dirty="0"/>
           </a:p>
@@ -2404,7 +2404,7 @@
                 <a:ea typeface="Times New Roman" pitchFamily="34" charset="-122"/>
                 <a:cs typeface="Times New Roman" pitchFamily="34" charset="-120"/>
               </a:rPr>
-              <a:t>Netaji Subhas University of Technology</a:t>
+              <a:t>Netaji Subhas University of Technology, East Campus</a:t>
             </a:r>
             <a:endParaRPr lang="en-US" sz="1600" dirty="0"/>
           </a:p>
@@ -2424,7 +2424,7 @@
                 <a:ea typeface="Times New Roman" pitchFamily="34" charset="-122"/>
                 <a:cs typeface="Times New Roman" pitchFamily="34" charset="-120"/>
               </a:rPr>
-              <a:t>(NSUT), Dwarka, New Delhi</a:t>
+              <a:t>Geeta Colony, New Delhi - 110031</a:t>
             </a:r>
             <a:endParaRPr lang="en-US" sz="1600" dirty="0"/>
           </a:p>
